--- a/NES-Finder.pptx
+++ b/NES-Finder.pptx
@@ -111,6 +111,11 @@
       </a:defRPr>
     </a:lvl9pPr>
   </p:defaultTextStyle>
+  <p:extLst>
+    <p:ext uri="{EFAFB233-063F-42B5-8137-9DF3F51BA10A}">
+      <p15:sldGuideLst xmlns:p15="http://schemas.microsoft.com/office/powerpoint/2012/main"/>
+    </p:ext>
+  </p:extLst>
 </p:presentation>
 </file>
 
@@ -267,7 +272,7 @@
           <a:p>
             <a:fld id="{D1D1EADE-8E88-4C7C-8AC5-FB148DE4940E}" type="datetime1">
               <a:rPr lang="en-US" smtClean="0"/>
-              <a:t>6/23/2025</a:t>
+              <a:t>6/24/2025</a:t>
             </a:fld>
             <a:endParaRPr lang="en-US"/>
           </a:p>
@@ -467,7 +472,7 @@
           <a:p>
             <a:fld id="{EC3C8B9C-477D-492A-96AD-1FC2CC997A73}" type="datetime1">
               <a:rPr lang="en-US" smtClean="0"/>
-              <a:t>6/23/2025</a:t>
+              <a:t>6/24/2025</a:t>
             </a:fld>
             <a:endParaRPr lang="en-US"/>
           </a:p>
@@ -677,7 +682,7 @@
           <a:p>
             <a:fld id="{42D3AED5-E26D-4E29-B1B3-7847B6779594}" type="datetime1">
               <a:rPr lang="en-US" smtClean="0"/>
-              <a:t>6/23/2025</a:t>
+              <a:t>6/24/2025</a:t>
             </a:fld>
             <a:endParaRPr lang="en-US"/>
           </a:p>
@@ -877,7 +882,7 @@
           <a:p>
             <a:fld id="{157B6794-849E-4626-908B-D15793550EFB}" type="datetime1">
               <a:rPr lang="en-US" smtClean="0"/>
-              <a:t>6/23/2025</a:t>
+              <a:t>6/24/2025</a:t>
             </a:fld>
             <a:endParaRPr lang="en-US"/>
           </a:p>
@@ -1153,7 +1158,7 @@
           <a:p>
             <a:fld id="{63DB64E7-5594-42A3-ADBF-E95A7ACEAD64}" type="datetime1">
               <a:rPr lang="en-US" smtClean="0"/>
-              <a:t>6/23/2025</a:t>
+              <a:t>6/24/2025</a:t>
             </a:fld>
             <a:endParaRPr lang="en-US"/>
           </a:p>
@@ -1426,7 +1431,7 @@
           <a:p>
             <a:fld id="{18462B0B-D248-4FFB-8695-AD7FA4B1284A}" type="datetime1">
               <a:rPr lang="en-US" smtClean="0"/>
-              <a:t>6/23/2025</a:t>
+              <a:t>6/24/2025</a:t>
             </a:fld>
             <a:endParaRPr lang="en-US"/>
           </a:p>
@@ -1849,7 +1854,7 @@
           <a:p>
             <a:fld id="{D0378EFB-9159-4510-B73F-4F0409ADE937}" type="datetime1">
               <a:rPr lang="en-US" smtClean="0"/>
-              <a:t>6/23/2025</a:t>
+              <a:t>6/24/2025</a:t>
             </a:fld>
             <a:endParaRPr lang="en-US"/>
           </a:p>
@@ -1991,7 +1996,7 @@
           <a:p>
             <a:fld id="{89BC9412-2452-4BED-A324-9D8C115361AD}" type="datetime1">
               <a:rPr lang="en-US" smtClean="0"/>
-              <a:t>6/23/2025</a:t>
+              <a:t>6/24/2025</a:t>
             </a:fld>
             <a:endParaRPr lang="en-US"/>
           </a:p>
@@ -2104,7 +2109,7 @@
           <a:p>
             <a:fld id="{F5318F62-D251-40E8-A23C-F4CFE9FEAB41}" type="datetime1">
               <a:rPr lang="en-US" smtClean="0"/>
-              <a:t>6/23/2025</a:t>
+              <a:t>6/24/2025</a:t>
             </a:fld>
             <a:endParaRPr lang="en-US"/>
           </a:p>
@@ -2417,7 +2422,7 @@
           <a:p>
             <a:fld id="{44F76144-149E-4874-93A5-554A0357CF82}" type="datetime1">
               <a:rPr lang="en-US" smtClean="0"/>
-              <a:t>6/23/2025</a:t>
+              <a:t>6/24/2025</a:t>
             </a:fld>
             <a:endParaRPr lang="en-US"/>
           </a:p>
@@ -2710,7 +2715,7 @@
           <a:p>
             <a:fld id="{50BA65D8-0540-4835-AE5C-25D29DBA01BE}" type="datetime1">
               <a:rPr lang="en-US" smtClean="0"/>
-              <a:t>6/23/2025</a:t>
+              <a:t>6/24/2025</a:t>
             </a:fld>
             <a:endParaRPr lang="en-US"/>
           </a:p>
@@ -2948,7 +2953,7 @@
           <a:p>
             <a:fld id="{E31BA835-12AC-4E8F-955A-EA3F4DE2791F}" type="datetime1">
               <a:rPr lang="en-US" smtClean="0"/>
-              <a:t>6/23/2025</a:t>
+              <a:t>6/24/2025</a:t>
             </a:fld>
             <a:endParaRPr lang="en-US"/>
           </a:p>
@@ -3588,7 +3593,7 @@
               <a:rPr lang="en-US" sz="2700" b="0" i="0" u="none" strike="noStrike" baseline="0" dirty="0">
                 <a:latin typeface="CMR17"/>
               </a:rPr>
-              <a:t>(project num. 3)</a:t>
+              <a:t>(project #3)</a:t>
             </a:r>
             <a:br>
               <a:rPr lang="en-US" sz="2700" dirty="0"/>
@@ -3640,8 +3645,8 @@
         </p:nvSpPr>
         <p:spPr>
           <a:xfrm>
-            <a:off x="5761876" y="4935672"/>
-            <a:ext cx="6135156" cy="1005657"/>
+            <a:off x="5761876" y="5504507"/>
+            <a:ext cx="5630024" cy="436821"/>
           </a:xfrm>
         </p:spPr>
         <p:txBody>
@@ -3881,12 +3886,6 @@
           <a:bodyPr/>
           <a:lstStyle/>
           <a:p>
-            <a:pPr marL="0" indent="0">
-              <a:buNone/>
-            </a:pPr>
-            <a:endParaRPr lang="en-US" dirty="0"/>
-          </a:p>
-          <a:p>
             <a:r>
               <a:rPr lang="en-US" sz="2000" dirty="0">
                 <a:latin typeface="+mj-lt"/>
@@ -4023,13 +4022,6 @@
           <a:bodyPr/>
           <a:lstStyle/>
           <a:p>
-            <a:pPr>
-              <a:buFont typeface="Arial" panose="020B0604020202020204" pitchFamily="34" charset="0"/>
-              <a:buChar char="•"/>
-            </a:pPr>
-            <a:endParaRPr lang="en-US" dirty="0"/>
-          </a:p>
-          <a:p>
             <a:r>
               <a:rPr lang="en-US" dirty="0"/>
               <a:t>Used ESM-2 protein language model to generate embeddings from full protein sequences.</a:t>
@@ -4146,7 +4138,7 @@
         </p:nvSpPr>
         <p:spPr bwMode="auto">
           <a:xfrm>
-            <a:off x="700635" y="2229894"/>
+            <a:off x="700635" y="2139364"/>
             <a:ext cx="10390152" cy="3724096"/>
           </a:xfrm>
           <a:prstGeom prst="rect">
@@ -4717,41 +4709,6 @@
           </a:p>
         </p:txBody>
       </p:sp>
-      <p:sp>
-        <p:nvSpPr>
-          <p:cNvPr id="2" name="כותרת 1">
-            <a:extLst>
-              <a:ext uri="{FF2B5EF4-FFF2-40B4-BE49-F238E27FC236}">
-                <a16:creationId xmlns:a16="http://schemas.microsoft.com/office/drawing/2014/main" id="{DF1D8383-A6B6-08FA-F563-1585162D2B03}"/>
-              </a:ext>
-            </a:extLst>
-          </p:cNvPr>
-          <p:cNvSpPr>
-            <a:spLocks noGrp="1"/>
-          </p:cNvSpPr>
-          <p:nvPr>
-            <p:ph type="title"/>
-          </p:nvPr>
-        </p:nvSpPr>
-        <p:spPr>
-          <a:xfrm>
-            <a:off x="704088" y="914400"/>
-            <a:ext cx="3799763" cy="1473200"/>
-          </a:xfrm>
-        </p:spPr>
-        <p:txBody>
-          <a:bodyPr>
-            <a:normAutofit/>
-          </a:bodyPr>
-          <a:lstStyle/>
-          <a:p>
-            <a:r>
-              <a:rPr lang="en-US" sz="3600" dirty="0"/>
-              <a:t>Results:</a:t>
-            </a:r>
-          </a:p>
-        </p:txBody>
-      </p:sp>
       <p:cxnSp>
         <p:nvCxnSpPr>
           <p:cNvPr id="32" name="Straight Connector 31">
@@ -4822,8 +4779,8 @@
         </p:nvSpPr>
         <p:spPr bwMode="auto">
           <a:xfrm>
-            <a:off x="704088" y="2387600"/>
-            <a:ext cx="3799763" cy="3767328"/>
+            <a:off x="720731" y="2258796"/>
+            <a:ext cx="4611686" cy="2318303"/>
           </a:xfrm>
           <a:prstGeom prst="rect">
             <a:avLst/>
@@ -4862,9 +4819,37 @@
             <a:prstTxWarp prst="textNoShape">
               <a:avLst/>
             </a:prstTxWarp>
-            <a:normAutofit/>
+            <a:normAutofit fontScale="92500" lnSpcReduction="10000"/>
           </a:bodyPr>
           <a:lstStyle/>
+          <a:p>
+            <a:pPr eaLnBrk="0" fontAlgn="base" hangingPunct="0">
+              <a:spcBef>
+                <a:spcPct val="0"/>
+              </a:spcBef>
+              <a:spcAft>
+                <a:spcPts val="600"/>
+              </a:spcAft>
+            </a:pPr>
+            <a:r>
+              <a:rPr lang="en-US" altLang="en-US" dirty="0"/>
+              <a:t>Initial test: Human vs. Bacteria: Model achieved near-perfect accuracy, </a:t>
+            </a:r>
+          </a:p>
+          <a:p>
+            <a:pPr eaLnBrk="0" fontAlgn="base" hangingPunct="0">
+              <a:spcBef>
+                <a:spcPct val="0"/>
+              </a:spcBef>
+              <a:spcAft>
+                <a:spcPts val="600"/>
+              </a:spcAft>
+            </a:pPr>
+            <a:r>
+              <a:rPr lang="en-US" altLang="en-US" dirty="0"/>
+              <a:t>We deemed the task too trivial, as it could be solved by separating human proteins from bacteria (validated with t-SNE).</a:t>
+            </a:r>
+          </a:p>
           <a:p>
             <a:pPr marL="0" marR="0" lvl="0" indent="0" defTabSz="914400" rtl="0" eaLnBrk="0" fontAlgn="base" latinLnBrk="0" hangingPunct="0">
               <a:spcBef>
@@ -4879,72 +4864,7 @@
               <a:buChar char="•"/>
               <a:tabLst/>
             </a:pPr>
-            <a:r>
-              <a:rPr kumimoji="0" lang="en-US" altLang="en-US" i="0" u="none" strike="noStrike" cap="none" normalizeH="0" baseline="0" dirty="0">
-                <a:ln>
-                  <a:noFill/>
-                </a:ln>
-                <a:effectLst/>
-                <a:latin typeface="Arial" panose="020B0604020202020204" pitchFamily="34" charset="0"/>
-              </a:rPr>
-              <a:t>Initial test -Human vs. Bacteria: </a:t>
-            </a:r>
-            <a:r>
-              <a:rPr kumimoji="0" lang="en-US" altLang="en-US" b="0" i="0" u="none" strike="noStrike" cap="none" normalizeH="0" baseline="0" dirty="0">
-                <a:ln>
-                  <a:noFill/>
-                </a:ln>
-                <a:effectLst/>
-                <a:latin typeface="Arial" panose="020B0604020202020204" pitchFamily="34" charset="0"/>
-              </a:rPr>
-              <a:t>Model achieved near-perfect accuracy, </a:t>
-            </a:r>
-          </a:p>
-          <a:p>
-            <a:pPr marL="0" marR="0" lvl="0" indent="0" defTabSz="914400" rtl="0" eaLnBrk="0" fontAlgn="base" latinLnBrk="0" hangingPunct="0">
-              <a:spcBef>
-                <a:spcPct val="0"/>
-              </a:spcBef>
-              <a:spcAft>
-                <a:spcPts val="600"/>
-              </a:spcAft>
-              <a:buClrTx/>
-              <a:buSzTx/>
-              <a:buNone/>
-              <a:tabLst/>
-            </a:pPr>
-            <a:r>
-              <a:rPr kumimoji="0" lang="en-US" altLang="en-US" b="0" i="0" u="none" strike="noStrike" cap="none" normalizeH="0" baseline="0" dirty="0">
-                <a:ln>
-                  <a:noFill/>
-                </a:ln>
-                <a:effectLst/>
-                <a:latin typeface="Arial" panose="020B0604020202020204" pitchFamily="34" charset="0"/>
-              </a:rPr>
-              <a:t>but task was too trivial due to species separation (validated with t-SNE).</a:t>
-            </a:r>
-          </a:p>
-          <a:p>
-            <a:pPr marL="0" marR="0" lvl="0" indent="0" defTabSz="914400" rtl="0" eaLnBrk="0" fontAlgn="base" latinLnBrk="0" hangingPunct="0">
-              <a:spcBef>
-                <a:spcPct val="0"/>
-              </a:spcBef>
-              <a:spcAft>
-                <a:spcPts val="600"/>
-              </a:spcAft>
-              <a:buClrTx/>
-              <a:buSzTx/>
-              <a:buFontTx/>
-              <a:buChar char="•"/>
-              <a:tabLst/>
-            </a:pPr>
-            <a:endParaRPr kumimoji="0" lang="en-US" altLang="en-US" b="0" i="0" u="none" strike="noStrike" cap="none" normalizeH="0" baseline="0" dirty="0">
-              <a:ln>
-                <a:noFill/>
-              </a:ln>
-              <a:effectLst/>
-              <a:latin typeface="Arial" panose="020B0604020202020204" pitchFamily="34" charset="0"/>
-            </a:endParaRPr>
+            <a:endParaRPr lang="en-US" altLang="en-US" dirty="0"/>
           </a:p>
         </p:txBody>
       </p:sp>
@@ -4977,7 +4897,7 @@
         </p:blipFill>
         <p:spPr>
           <a:xfrm>
-            <a:off x="4981575" y="735286"/>
+            <a:off x="5470458" y="536114"/>
             <a:ext cx="6495042" cy="5419642"/>
           </a:xfrm>
           <a:prstGeom prst="rect">
@@ -4985,6 +4905,41 @@
           </a:prstGeom>
         </p:spPr>
       </p:pic>
+      <p:sp>
+        <p:nvSpPr>
+          <p:cNvPr id="6" name="כותרת 1">
+            <a:extLst>
+              <a:ext uri="{FF2B5EF4-FFF2-40B4-BE49-F238E27FC236}">
+                <a16:creationId xmlns:a16="http://schemas.microsoft.com/office/drawing/2014/main" id="{D3206D66-C12B-5DB2-BF10-8280BE4A67FC}"/>
+              </a:ext>
+            </a:extLst>
+          </p:cNvPr>
+          <p:cNvSpPr>
+            <a:spLocks noGrp="1"/>
+          </p:cNvSpPr>
+          <p:nvPr>
+            <p:ph type="title"/>
+          </p:nvPr>
+        </p:nvSpPr>
+        <p:spPr>
+          <a:xfrm>
+            <a:off x="704088" y="914400"/>
+            <a:ext cx="2147754" cy="796705"/>
+          </a:xfrm>
+        </p:spPr>
+        <p:txBody>
+          <a:bodyPr>
+            <a:normAutofit/>
+          </a:bodyPr>
+          <a:lstStyle/>
+          <a:p>
+            <a:r>
+              <a:rPr lang="en-US" sz="4000" dirty="0"/>
+              <a:t>Result</a:t>
+            </a:r>
+          </a:p>
+        </p:txBody>
+      </p:sp>
     </p:spTree>
     <p:extLst>
       <p:ext uri="{BB962C8B-B14F-4D97-AF65-F5344CB8AC3E}">
@@ -5205,7 +5160,7 @@
         <p:spPr>
           <a:xfrm>
             <a:off x="704088" y="2231136"/>
-            <a:ext cx="6001512" cy="3931920"/>
+            <a:ext cx="5533750" cy="1725228"/>
           </a:xfrm>
         </p:spPr>
         <p:txBody>
@@ -5222,7 +5177,7 @@
           <a:p>
             <a:r>
               <a:rPr lang="en-US" dirty="0"/>
-              <a:t>Poor results </a:t>
+              <a:t>Results were Poor results </a:t>
             </a:r>
           </a:p>
         </p:txBody>
@@ -5242,15 +5197,20 @@
           <p:nvPr/>
         </p:nvPicPr>
         <p:blipFill>
-          <a:blip r:embed="rId2"/>
-          <a:stretch>
-            <a:fillRect/>
-          </a:stretch>
+          <a:blip r:embed="rId2">
+            <a:extLst>
+              <a:ext uri="{28A0092B-C50C-407E-A947-70E740481C1C}">
+                <a14:useLocalDpi xmlns:a14="http://schemas.microsoft.com/office/drawing/2010/main" val="0"/>
+              </a:ext>
+            </a:extLst>
+          </a:blip>
+          <a:srcRect/>
+          <a:stretch/>
         </p:blipFill>
         <p:spPr>
           <a:xfrm>
-            <a:off x="6705600" y="914400"/>
-            <a:ext cx="5170842" cy="5157914"/>
+            <a:off x="6715328" y="914400"/>
+            <a:ext cx="5151385" cy="5157914"/>
           </a:xfrm>
           <a:prstGeom prst="rect">
             <a:avLst/>
@@ -5492,7 +5452,7 @@
             </a:pPr>
             <a:r>
               <a:rPr lang="en-US" dirty="0"/>
-              <a:t>Final test: Model evaluated on human non-binders with AUC = 0.79, showing good predictive performance.</a:t>
+              <a:t>Final test: Model evaluated on human non-binders with AUC = 0.79, showing decent predictive ability.</a:t>
             </a:r>
           </a:p>
           <a:p>
@@ -5737,51 +5697,247 @@
           </a:fontRef>
         </p:style>
       </p:cxnSp>
-      <p:sp>
-        <p:nvSpPr>
-          <p:cNvPr id="3" name="מציין מיקום תוכן 2">
-            <a:extLst>
-              <a:ext uri="{FF2B5EF4-FFF2-40B4-BE49-F238E27FC236}">
-                <a16:creationId xmlns:a16="http://schemas.microsoft.com/office/drawing/2014/main" id="{93BC4B4B-2531-337C-F8B7-0F9C0C2DCDF0}"/>
-              </a:ext>
-            </a:extLst>
-          </p:cNvPr>
-          <p:cNvSpPr>
-            <a:spLocks noGrp="1"/>
-          </p:cNvSpPr>
-          <p:nvPr>
-            <p:ph idx="1"/>
-          </p:nvPr>
-        </p:nvSpPr>
-        <p:spPr>
-          <a:xfrm>
-            <a:off x="704088" y="2231136"/>
-            <a:ext cx="4316146" cy="3931920"/>
-          </a:xfrm>
-        </p:spPr>
-        <p:txBody>
-          <a:bodyPr>
-            <a:normAutofit/>
-          </a:bodyPr>
-          <a:lstStyle/>
-          <a:p>
-            <a:r>
-              <a:rPr lang="en-US" b="0" i="0" dirty="0">
-                <a:effectLst/>
-                <a:latin typeface="gg sans"/>
-              </a:rPr>
-              <a:t>We examined the correlation between a protein's model score and the experimental binding strength</a:t>
-            </a:r>
-            <a:r>
-              <a:rPr lang="en-US" dirty="0">
-                <a:latin typeface="gg sans"/>
-              </a:rPr>
-              <a:t>.</a:t>
-            </a:r>
-            <a:endParaRPr lang="en-US" dirty="0"/>
-          </a:p>
-        </p:txBody>
-      </p:sp>
+      <mc:AlternateContent xmlns:mc="http://schemas.openxmlformats.org/markup-compatibility/2006">
+        <mc:Choice xmlns:a14="http://schemas.microsoft.com/office/drawing/2010/main" Requires="a14">
+          <p:sp>
+            <p:nvSpPr>
+              <p:cNvPr id="3" name="מציין מיקום תוכן 2">
+                <a:extLst>
+                  <a:ext uri="{FF2B5EF4-FFF2-40B4-BE49-F238E27FC236}">
+                    <a16:creationId xmlns:a16="http://schemas.microsoft.com/office/drawing/2014/main" id="{93BC4B4B-2531-337C-F8B7-0F9C0C2DCDF0}"/>
+                  </a:ext>
+                </a:extLst>
+              </p:cNvPr>
+              <p:cNvSpPr>
+                <a:spLocks noGrp="1"/>
+              </p:cNvSpPr>
+              <p:nvPr>
+                <p:ph idx="1"/>
+              </p:nvPr>
+            </p:nvSpPr>
+            <p:spPr>
+              <a:xfrm>
+                <a:off x="704088" y="2231136"/>
+                <a:ext cx="4316146" cy="3712464"/>
+              </a:xfrm>
+            </p:spPr>
+            <p:txBody>
+              <a:bodyPr>
+                <a:normAutofit fontScale="92500"/>
+              </a:bodyPr>
+              <a:lstStyle/>
+              <a:p>
+                <a:r>
+                  <a:rPr lang="en-US" b="0" i="0" dirty="0">
+                    <a:effectLst/>
+                    <a:latin typeface="Arial (Body)"/>
+                  </a:rPr>
+                  <a:t>We examined the correlation between a protein's model score and the experimental binding strength</a:t>
+                </a:r>
+                <a:r>
+                  <a:rPr lang="en-US" dirty="0">
+                    <a:latin typeface="Arial (Body)"/>
+                  </a:rPr>
+                  <a:t>.</a:t>
+                </a:r>
+              </a:p>
+              <a:p>
+                <a:r>
+                  <a:rPr lang="en-US" dirty="0">
+                    <a:latin typeface="Arial (Body)"/>
+                  </a:rPr>
+                  <a:t>The binding strength is measured by the ratio:</a:t>
+                </a:r>
+              </a:p>
+              <a:p>
+                <a:pPr marL="914400" lvl="2" indent="0">
+                  <a:buNone/>
+                </a:pPr>
+                <a14:m>
+                  <m:oMathPara xmlns:m="http://schemas.openxmlformats.org/officeDocument/2006/math">
+                    <m:oMathParaPr>
+                      <m:jc m:val="centerGroup"/>
+                    </m:oMathParaPr>
+                    <m:oMath xmlns:m="http://schemas.openxmlformats.org/officeDocument/2006/math">
+                      <m:f>
+                        <m:fPr>
+                          <m:ctrlPr>
+                            <a:rPr lang="en-AU" sz="2200" i="1">
+                              <a:latin typeface="Cambria Math" panose="02040503050406030204" pitchFamily="18" charset="0"/>
+                            </a:rPr>
+                          </m:ctrlPr>
+                        </m:fPr>
+                        <m:num>
+                          <m:sSup>
+                            <m:sSupPr>
+                              <m:ctrlPr>
+                                <a:rPr lang="en-AU" sz="2200" i="1" smtClean="0">
+                                  <a:latin typeface="Cambria Math" panose="02040503050406030204" pitchFamily="18" charset="0"/>
+                                </a:rPr>
+                              </m:ctrlPr>
+                            </m:sSupPr>
+                            <m:e>
+                              <m:r>
+                                <a:rPr lang="en-AU" sz="2200" i="1">
+                                  <a:latin typeface="Cambria Math" panose="02040503050406030204" pitchFamily="18" charset="0"/>
+                                </a:rPr>
+                                <m:t>𝑖𝐵𝐴𝑄</m:t>
+                              </m:r>
+                            </m:e>
+                            <m:sup>
+                              <m:r>
+                                <a:rPr lang="en-AU" sz="2200" b="0" i="1" smtClean="0">
+                                  <a:latin typeface="Cambria Math" panose="02040503050406030204" pitchFamily="18" charset="0"/>
+                                </a:rPr>
+                                <m:t>∗</m:t>
+                              </m:r>
+                            </m:sup>
+                          </m:sSup>
+                          <m:r>
+                            <a:rPr lang="en-AU" sz="2200" i="1">
+                              <a:latin typeface="Cambria Math" panose="02040503050406030204" pitchFamily="18" charset="0"/>
+                            </a:rPr>
+                            <m:t>[</m:t>
+                          </m:r>
+                          <m:r>
+                            <a:rPr lang="en-AU" sz="2200" i="1">
+                              <a:latin typeface="Cambria Math" panose="02040503050406030204" pitchFamily="18" charset="0"/>
+                            </a:rPr>
+                            <m:t>𝐶𝑅𝑀</m:t>
+                          </m:r>
+                          <m:r>
+                            <a:rPr lang="en-AU" sz="2200" i="1">
+                              <a:latin typeface="Cambria Math" panose="02040503050406030204" pitchFamily="18" charset="0"/>
+                            </a:rPr>
+                            <m:t>1</m:t>
+                          </m:r>
+                          <m:r>
+                            <a:rPr lang="en-AU" sz="2200" i="1">
+                              <a:latin typeface="Cambria Math" panose="02040503050406030204" pitchFamily="18" charset="0"/>
+                            </a:rPr>
+                            <m:t>+</m:t>
+                          </m:r>
+                          <m:r>
+                            <a:rPr lang="en-AU" sz="2200" i="1">
+                              <a:latin typeface="Cambria Math" panose="02040503050406030204" pitchFamily="18" charset="0"/>
+                            </a:rPr>
+                            <m:t>𝑅𝑎𝑛𝐺𝑇𝑃</m:t>
+                          </m:r>
+                          <m:r>
+                            <a:rPr lang="en-AU" sz="2200" i="1">
+                              <a:latin typeface="Cambria Math" panose="02040503050406030204" pitchFamily="18" charset="0"/>
+                            </a:rPr>
+                            <m:t>]</m:t>
+                          </m:r>
+                        </m:num>
+                        <m:den>
+                          <m:r>
+                            <a:rPr lang="en-AU" sz="2200" i="1">
+                              <a:latin typeface="Cambria Math" panose="02040503050406030204" pitchFamily="18" charset="0"/>
+                            </a:rPr>
+                            <m:t>𝑖𝐵𝐴𝑄</m:t>
+                          </m:r>
+                          <m:d>
+                            <m:dPr>
+                              <m:begChr m:val="["/>
+                              <m:endChr m:val="]"/>
+                              <m:ctrlPr>
+                                <a:rPr lang="en-AU" sz="2200" i="1">
+                                  <a:latin typeface="Cambria Math" panose="02040503050406030204" pitchFamily="18" charset="0"/>
+                                </a:rPr>
+                              </m:ctrlPr>
+                            </m:dPr>
+                            <m:e>
+                              <m:r>
+                                <a:rPr lang="en-AU" sz="2200" i="1">
+                                  <a:latin typeface="Cambria Math" panose="02040503050406030204" pitchFamily="18" charset="0"/>
+                                </a:rPr>
+                                <m:t>𝐼𝑛𝑝𝑢𝑡</m:t>
+                              </m:r>
+                            </m:e>
+                          </m:d>
+                        </m:den>
+                      </m:f>
+                    </m:oMath>
+                  </m:oMathPara>
+                </a14:m>
+                <a:endParaRPr lang="en-AU" sz="2200" b="0" dirty="0">
+                  <a:latin typeface="Arial (Body)"/>
+                </a:endParaRPr>
+              </a:p>
+              <a:p>
+                <a:pPr marL="914400" lvl="2" indent="0">
+                  <a:buNone/>
+                </a:pPr>
+                <a:endParaRPr lang="en-AU" sz="2200" dirty="0">
+                  <a:latin typeface="Arial (Body)"/>
+                </a:endParaRPr>
+              </a:p>
+              <a:p>
+                <a:pPr marL="914400" lvl="2" indent="0">
+                  <a:buNone/>
+                </a:pPr>
+                <a:r>
+                  <a:rPr lang="en-AU" sz="1000" b="0" dirty="0">
+                    <a:latin typeface="Arial (Body)"/>
+                  </a:rPr>
+                  <a:t>*</a:t>
+                </a:r>
+                <a:r>
+                  <a:rPr lang="en-AU" sz="1000" dirty="0"/>
+                  <a:t> Intensity-Based Absolute Quantification</a:t>
+                </a:r>
+                <a:endParaRPr lang="en-AU" sz="1000" b="0" dirty="0">
+                  <a:latin typeface="Arial (Body)"/>
+                </a:endParaRPr>
+              </a:p>
+            </p:txBody>
+          </p:sp>
+        </mc:Choice>
+        <mc:Fallback>
+          <p:sp>
+            <p:nvSpPr>
+              <p:cNvPr id="3" name="מציין מיקום תוכן 2">
+                <a:extLst>
+                  <a:ext uri="{FF2B5EF4-FFF2-40B4-BE49-F238E27FC236}">
+                    <a16:creationId xmlns:a16="http://schemas.microsoft.com/office/drawing/2014/main" id="{93BC4B4B-2531-337C-F8B7-0F9C0C2DCDF0}"/>
+                  </a:ext>
+                </a:extLst>
+              </p:cNvPr>
+              <p:cNvSpPr>
+                <a:spLocks noGrp="1" noRot="1" noChangeAspect="1" noMove="1" noResize="1" noEditPoints="1" noAdjustHandles="1" noChangeArrowheads="1" noChangeShapeType="1" noTextEdit="1"/>
+              </p:cNvSpPr>
+              <p:nvPr>
+                <p:ph idx="1"/>
+              </p:nvPr>
+            </p:nvSpPr>
+            <p:spPr>
+              <a:xfrm>
+                <a:off x="704088" y="2231136"/>
+                <a:ext cx="4316146" cy="3712464"/>
+              </a:xfrm>
+              <a:blipFill>
+                <a:blip r:embed="rId2"/>
+                <a:stretch>
+                  <a:fillRect l="-1130" t="-164" b="-493"/>
+                </a:stretch>
+              </a:blipFill>
+            </p:spPr>
+            <p:txBody>
+              <a:bodyPr/>
+              <a:lstStyle/>
+              <a:p>
+                <a:r>
+                  <a:rPr lang="en-IL">
+                    <a:noFill/>
+                  </a:rPr>
+                  <a:t> </a:t>
+                </a:r>
+              </a:p>
+            </p:txBody>
+          </p:sp>
+        </mc:Fallback>
+      </mc:AlternateContent>
       <p:pic>
         <p:nvPicPr>
           <p:cNvPr id="5" name="תמונה 4" descr="תמונה שמכילה טקסט, צילום מסך, קו, עלילה&#10;&#10;תוכן שנוצר על-ידי בינה מלאכותית עשוי להיות שגוי.">
@@ -5797,7 +5953,7 @@
           <p:nvPr/>
         </p:nvPicPr>
         <p:blipFill>
-          <a:blip r:embed="rId2">
+          <a:blip r:embed="rId3">
             <a:extLst>
               <a:ext uri="{28A0092B-C50C-407E-A947-70E740481C1C}">
                 <a14:useLocalDpi xmlns:a14="http://schemas.microsoft.com/office/drawing/2010/main" val="0"/>

--- a/NES-Finder.pptx
+++ b/NES-Finder.pptx
@@ -3934,8 +3934,16 @@
           </a:p>
           <a:p>
             <a:r>
+              <a:rPr lang="en-US" b="1" dirty="0"/>
+              <a:t>Project goal: </a:t>
+            </a:r>
+            <a:r>
               <a:rPr lang="en-US" dirty="0"/>
-              <a:t>Project goal: develop a deep learning model to identify NES-containing proteins based only on their amino acid sequence.</a:t>
+              <a:t>develop a deep learning model to </a:t>
+            </a:r>
+            <a:r>
+              <a:rPr lang="en-US" b="1" dirty="0"/>
+              <a:t>identify NES-containing proteins based only on their amino acid sequence.</a:t>
             </a:r>
           </a:p>
         </p:txBody>
@@ -4034,7 +4042,25 @@
             </a:pPr>
             <a:r>
               <a:rPr lang="en-US" dirty="0"/>
-              <a:t>Extracted sub-sequences: known NES motifs (positives) and random segments of non NES proteins (negatives).</a:t>
+              <a:t>For training, we extracted sub-sequences: </a:t>
+            </a:r>
+          </a:p>
+          <a:p>
+            <a:pPr marL="0" indent="0">
+              <a:buNone/>
+            </a:pPr>
+            <a:r>
+              <a:rPr lang="en-US" dirty="0"/>
+              <a:t>	- For positives: known NES motifs</a:t>
+            </a:r>
+          </a:p>
+          <a:p>
+            <a:pPr marL="0" indent="0">
+              <a:buNone/>
+            </a:pPr>
+            <a:r>
+              <a:rPr lang="en-US" dirty="0"/>
+              <a:t>	- For negatives: random segments of non-NES proteins.</a:t>
             </a:r>
           </a:p>
           <a:p>
@@ -4044,7 +4070,7 @@
             </a:pPr>
             <a:r>
               <a:rPr lang="en-US" dirty="0"/>
-              <a:t>Trained a Transformer-based classifier using binary cross-entropy loss.</a:t>
+              <a:t>Trained a Transformer-based classifier using binary cross-entropy loss on </a:t>
             </a:r>
           </a:p>
           <a:p>
@@ -4138,8 +4164,8 @@
         </p:nvSpPr>
         <p:spPr bwMode="auto">
           <a:xfrm>
-            <a:off x="700635" y="2139364"/>
-            <a:ext cx="10390152" cy="3724096"/>
+            <a:off x="700634" y="1949568"/>
+            <a:ext cx="10878747" cy="4103688"/>
           </a:xfrm>
           <a:prstGeom prst="rect">
             <a:avLst/>
@@ -4280,7 +4306,7 @@
           <a:p>
             <a:pPr eaLnBrk="0" fontAlgn="base" hangingPunct="0">
               <a:lnSpc>
-                <a:spcPct val="100000"/>
+                <a:spcPct val="150000"/>
               </a:lnSpc>
               <a:spcBef>
                 <a:spcPct val="0"/>
@@ -4303,7 +4329,68 @@
           <a:p>
             <a:pPr eaLnBrk="0" fontAlgn="base" hangingPunct="0">
               <a:lnSpc>
-                <a:spcPct val="100000"/>
+                <a:spcPct val="150000"/>
+              </a:lnSpc>
+              <a:spcBef>
+                <a:spcPct val="0"/>
+              </a:spcBef>
+              <a:spcAft>
+                <a:spcPct val="0"/>
+              </a:spcAft>
+            </a:pPr>
+            <a:r>
+              <a:rPr lang="en-US" altLang="en-US" dirty="0">
+                <a:latin typeface="Arial" panose="020B0604020202020204" pitchFamily="34" charset="0"/>
+              </a:rPr>
+              <a:t>Initial negatives: Random bacterial peptide’s segments from PDB.</a:t>
+            </a:r>
+          </a:p>
+          <a:p>
+            <a:pPr eaLnBrk="0" fontAlgn="base" hangingPunct="0">
+              <a:lnSpc>
+                <a:spcPct val="150000"/>
+              </a:lnSpc>
+              <a:spcBef>
+                <a:spcPct val="0"/>
+              </a:spcBef>
+              <a:spcAft>
+                <a:spcPct val="0"/>
+              </a:spcAft>
+            </a:pPr>
+            <a:r>
+              <a:rPr lang="en-US" altLang="en-US" dirty="0">
+                <a:latin typeface="Arial" panose="020B0604020202020204" pitchFamily="34" charset="0"/>
+              </a:rPr>
+              <a:t>Secondary negatives: </a:t>
+            </a:r>
+            <a:r>
+              <a:rPr lang="en-US" altLang="en-US" dirty="0">
+                <a:latin typeface="Arial" panose="020B0604020202020204" pitchFamily="34" charset="0"/>
+                <a:hlinkClick r:id="rId2"/>
+              </a:rPr>
+              <a:t>https://www.nature.com/articles/s41598-019-43004-0</a:t>
+            </a:r>
+            <a:r>
+              <a:rPr lang="en-US" altLang="en-US" dirty="0">
+                <a:latin typeface="Arial" panose="020B0604020202020204" pitchFamily="34" charset="0"/>
+              </a:rPr>
+              <a:t> </a:t>
+            </a:r>
+            <a:endParaRPr kumimoji="0" lang="en-US" altLang="en-US" b="0" i="0" u="none" strike="noStrike" cap="none" normalizeH="0" baseline="0" dirty="0">
+              <a:ln>
+                <a:noFill/>
+              </a:ln>
+              <a:solidFill>
+                <a:schemeClr val="tx1"/>
+              </a:solidFill>
+              <a:effectLst/>
+              <a:latin typeface="Arial" panose="020B0604020202020204" pitchFamily="34" charset="0"/>
+            </a:endParaRPr>
+          </a:p>
+          <a:p>
+            <a:pPr eaLnBrk="0" fontAlgn="base" hangingPunct="0">
+              <a:lnSpc>
+                <a:spcPct val="150000"/>
               </a:lnSpc>
               <a:spcBef>
                 <a:spcPct val="0"/>
@@ -4336,26 +4423,7 @@
                 <a:effectLst/>
                 <a:latin typeface="Arial" panose="020B0604020202020204" pitchFamily="34" charset="0"/>
               </a:rPr>
-              <a:t>: Random segments from </a:t>
-            </a:r>
-            <a:r>
-              <a:rPr lang="en-US" altLang="en-US" dirty="0">
-                <a:latin typeface="Arial" panose="020B0604020202020204" pitchFamily="34" charset="0"/>
-              </a:rPr>
-              <a:t>h</a:t>
-            </a:r>
-            <a:r>
-              <a:rPr kumimoji="0" lang="en-US" altLang="en-US" b="0" i="0" u="none" strike="noStrike" cap="none" normalizeH="0" baseline="0" dirty="0">
-                <a:ln>
-                  <a:noFill/>
-                </a:ln>
-                <a:solidFill>
-                  <a:schemeClr val="tx1"/>
-                </a:solidFill>
-                <a:effectLst/>
-                <a:latin typeface="Arial" panose="020B0604020202020204" pitchFamily="34" charset="0"/>
-              </a:rPr>
-              <a:t>uman proteins experimentally shown </a:t>
+              <a:t>: Human proteins experimentally shown </a:t>
             </a:r>
             <a:r>
               <a:rPr kumimoji="0" lang="en-US" altLang="en-US" i="0" u="none" strike="noStrike" cap="none" normalizeH="0" baseline="0" dirty="0">
@@ -4413,7 +4481,7 @@
           <a:p>
             <a:pPr eaLnBrk="0" fontAlgn="base" hangingPunct="0">
               <a:lnSpc>
-                <a:spcPct val="100000"/>
+                <a:spcPct val="150000"/>
               </a:lnSpc>
               <a:spcBef>
                 <a:spcPct val="0"/>
@@ -4434,116 +4502,9 @@
             </a:endParaRPr>
           </a:p>
           <a:p>
-            <a:pPr eaLnBrk="0" fontAlgn="base" hangingPunct="0">
-              <a:lnSpc>
-                <a:spcPct val="100000"/>
-              </a:lnSpc>
-              <a:spcBef>
-                <a:spcPct val="0"/>
-              </a:spcBef>
-              <a:spcAft>
-                <a:spcPct val="0"/>
-              </a:spcAft>
-            </a:pPr>
-            <a:r>
-              <a:rPr kumimoji="0" lang="en-US" altLang="en-US" i="0" u="none" strike="noStrike" cap="none" normalizeH="0" baseline="0" dirty="0">
-                <a:ln>
-                  <a:noFill/>
-                </a:ln>
-                <a:solidFill>
-                  <a:schemeClr val="tx1"/>
-                </a:solidFill>
-                <a:effectLst/>
-                <a:latin typeface="Arial" panose="020B0604020202020204" pitchFamily="34" charset="0"/>
-              </a:rPr>
-              <a:t>Initial negatives</a:t>
-            </a:r>
-            <a:r>
-              <a:rPr kumimoji="0" lang="en-US" altLang="en-US" b="0" i="0" u="none" strike="noStrike" cap="none" normalizeH="0" baseline="0" dirty="0">
-                <a:ln>
-                  <a:noFill/>
-                </a:ln>
-                <a:solidFill>
-                  <a:schemeClr val="tx1"/>
-                </a:solidFill>
-                <a:effectLst/>
-                <a:latin typeface="Arial" panose="020B0604020202020204" pitchFamily="34" charset="0"/>
-              </a:rPr>
-              <a:t>: Random bacterial peptide’s segments from PDB.</a:t>
-            </a:r>
-            <a:endParaRPr lang="en-US" altLang="en-US" dirty="0">
-              <a:latin typeface="Arial" panose="020B0604020202020204" pitchFamily="34" charset="0"/>
-            </a:endParaRPr>
-          </a:p>
-          <a:p>
-            <a:pPr eaLnBrk="0" fontAlgn="base" hangingPunct="0">
-              <a:lnSpc>
-                <a:spcPct val="100000"/>
-              </a:lnSpc>
-              <a:spcBef>
-                <a:spcPct val="0"/>
-              </a:spcBef>
-              <a:spcAft>
-                <a:spcPct val="0"/>
-              </a:spcAft>
-            </a:pPr>
-            <a:endParaRPr kumimoji="0" lang="en-US" altLang="en-US" b="0" i="0" u="none" strike="noStrike" cap="none" normalizeH="0" baseline="0" dirty="0">
-              <a:ln>
-                <a:noFill/>
-              </a:ln>
-              <a:solidFill>
-                <a:schemeClr val="tx1"/>
-              </a:solidFill>
-              <a:effectLst/>
-              <a:latin typeface="Arial" panose="020B0604020202020204" pitchFamily="34" charset="0"/>
-            </a:endParaRPr>
-          </a:p>
-          <a:p>
-            <a:pPr eaLnBrk="0" fontAlgn="base" hangingPunct="0">
-              <a:lnSpc>
-                <a:spcPct val="100000"/>
-              </a:lnSpc>
-              <a:spcBef>
-                <a:spcPct val="0"/>
-              </a:spcBef>
-              <a:spcAft>
-                <a:spcPct val="0"/>
-              </a:spcAft>
-            </a:pPr>
-            <a:r>
-              <a:rPr lang="en-US" altLang="en-US" dirty="0">
-                <a:latin typeface="Arial" panose="020B0604020202020204" pitchFamily="34" charset="0"/>
-              </a:rPr>
-              <a:t>Secondary negatives: </a:t>
-            </a:r>
-            <a:r>
-              <a:rPr lang="en-US" altLang="en-US" dirty="0">
-                <a:latin typeface="Arial" panose="020B0604020202020204" pitchFamily="34" charset="0"/>
-                <a:hlinkClick r:id="rId2"/>
-              </a:rPr>
-              <a:t>https://www.nature.com/articles/s41598-019-43004-0</a:t>
-            </a:r>
-            <a:r>
-              <a:rPr lang="en-US" altLang="en-US" dirty="0">
-                <a:latin typeface="Arial" panose="020B0604020202020204" pitchFamily="34" charset="0"/>
-              </a:rPr>
-              <a:t> </a:t>
-            </a:r>
-            <a:endParaRPr kumimoji="0" lang="en-US" altLang="en-US" b="0" i="0" u="none" strike="noStrike" cap="none" normalizeH="0" baseline="0" dirty="0">
-              <a:ln>
-                <a:noFill/>
-              </a:ln>
-              <a:solidFill>
-                <a:schemeClr val="tx1"/>
-              </a:solidFill>
-              <a:effectLst/>
-              <a:latin typeface="Arial" panose="020B0604020202020204" pitchFamily="34" charset="0"/>
-            </a:endParaRPr>
-          </a:p>
-          <a:p>
             <a:pPr marL="0" indent="0" eaLnBrk="0" fontAlgn="base" hangingPunct="0">
               <a:lnSpc>
-                <a:spcPct val="100000"/>
+                <a:spcPct val="150000"/>
               </a:lnSpc>
               <a:spcBef>
                 <a:spcPct val="0"/>
@@ -4568,7 +4529,7 @@
           <a:p>
             <a:pPr marL="0" marR="0" lvl="0" indent="0" algn="l" defTabSz="914400" rtl="0" eaLnBrk="0" fontAlgn="base" latinLnBrk="0" hangingPunct="0">
               <a:lnSpc>
-                <a:spcPct val="100000"/>
+                <a:spcPct val="150000"/>
               </a:lnSpc>
               <a:spcBef>
                 <a:spcPct val="0"/>

--- a/NES-Finder.pptx
+++ b/NES-Finder.pptx
@@ -13,6 +13,7 @@
     <p:sldId id="261" r:id="rId7"/>
     <p:sldId id="262" r:id="rId8"/>
     <p:sldId id="263" r:id="rId9"/>
+    <p:sldId id="264" r:id="rId10"/>
   </p:sldIdLst>
   <p:sldSz cx="12192000" cy="6858000"/>
   <p:notesSz cx="6858000" cy="9144000"/>
@@ -4070,7 +4071,7 @@
             </a:pPr>
             <a:r>
               <a:rPr lang="en-US" dirty="0"/>
-              <a:t>Trained a Transformer-based classifier using binary cross-entropy loss on </a:t>
+              <a:t>Trained a Transformer-based classifier using binary cross-entropy loss.</a:t>
             </a:r>
           </a:p>
           <a:p>
@@ -4164,8 +4165,8 @@
         </p:nvSpPr>
         <p:spPr bwMode="auto">
           <a:xfrm>
-            <a:off x="700634" y="1949568"/>
-            <a:ext cx="10878747" cy="4103688"/>
+            <a:off x="700634" y="2137087"/>
+            <a:ext cx="10878747" cy="3728649"/>
           </a:xfrm>
           <a:prstGeom prst="rect">
             <a:avLst/>
@@ -4235,7 +4236,7 @@
                 <a:effectLst/>
                 <a:latin typeface="Arial" panose="020B0604020202020204" pitchFamily="34" charset="0"/>
               </a:rPr>
-              <a:t>Positive samples</a:t>
+              <a:t>Positive training samples</a:t>
             </a:r>
             <a:r>
               <a:rPr kumimoji="0" lang="en-US" altLang="en-US" b="0" i="0" u="none" strike="noStrike" cap="none" normalizeH="0" baseline="0" dirty="0">
@@ -4361,20 +4362,20 @@
               <a:rPr lang="en-US" altLang="en-US" dirty="0">
                 <a:latin typeface="Arial" panose="020B0604020202020204" pitchFamily="34" charset="0"/>
               </a:rPr>
-              <a:t>Secondary negatives: </a:t>
+              <a:t>Secondary negatives: from </a:t>
             </a:r>
             <a:r>
               <a:rPr lang="en-US" altLang="en-US" dirty="0">
                 <a:latin typeface="Arial" panose="020B0604020202020204" pitchFamily="34" charset="0"/>
                 <a:hlinkClick r:id="rId2"/>
               </a:rPr>
-              <a:t>https://www.nature.com/articles/s41598-019-43004-0</a:t>
+              <a:t>Yoonji Lee, et al</a:t>
             </a:r>
             <a:r>
               <a:rPr lang="en-US" altLang="en-US" dirty="0">
                 <a:latin typeface="Arial" panose="020B0604020202020204" pitchFamily="34" charset="0"/>
               </a:rPr>
-              <a:t> </a:t>
+              <a:t>.</a:t>
             </a:r>
             <a:endParaRPr kumimoji="0" lang="en-US" altLang="en-US" b="0" i="0" u="none" strike="noStrike" cap="none" normalizeH="0" baseline="0" dirty="0">
               <a:ln>
@@ -4452,7 +4453,7 @@
               <a:t>(from </a:t>
             </a:r>
             <a:r>
-              <a:rPr kumimoji="0" lang="en-US" altLang="en-US" b="0" i="0" u="none" strike="noStrike" cap="none" normalizeH="0" baseline="0" dirty="0" err="1">
+              <a:rPr kumimoji="0" lang="en-US" altLang="en-US" b="0" i="0" u="none" strike="noStrike" cap="none" normalizeH="0" baseline="0" dirty="0">
                 <a:ln>
                   <a:noFill/>
                 </a:ln>
@@ -4461,8 +4462,9 @@
                 </a:solidFill>
                 <a:effectLst/>
                 <a:latin typeface="Arial" panose="020B0604020202020204" pitchFamily="34" charset="0"/>
+                <a:hlinkClick r:id="rId3"/>
               </a:rPr>
-              <a:t>Kırlı</a:t>
+              <a:t>Kırlı et al</a:t>
             </a:r>
             <a:r>
               <a:rPr kumimoji="0" lang="en-US" altLang="en-US" b="0" i="0" u="none" strike="noStrike" cap="none" normalizeH="0" baseline="0" dirty="0">
@@ -4475,7 +4477,7 @@
                 <a:effectLst/>
                 <a:latin typeface="Arial" panose="020B0604020202020204" pitchFamily="34" charset="0"/>
               </a:rPr>
-              <a:t> et al.).</a:t>
+              <a:t>).</a:t>
             </a:r>
           </a:p>
           <a:p>
@@ -4490,19 +4492,12 @@
                 <a:spcPct val="0"/>
               </a:spcAft>
             </a:pPr>
-            <a:endParaRPr kumimoji="0" lang="en-US" altLang="en-US" b="0" i="0" u="none" strike="noStrike" cap="none" normalizeH="0" baseline="0" dirty="0">
-              <a:ln>
-                <a:noFill/>
-              </a:ln>
-              <a:solidFill>
-                <a:schemeClr val="tx1"/>
-              </a:solidFill>
-              <a:effectLst/>
+            <a:endParaRPr lang="en-US" altLang="en-US" dirty="0">
               <a:latin typeface="Arial" panose="020B0604020202020204" pitchFamily="34" charset="0"/>
             </a:endParaRPr>
           </a:p>
           <a:p>
-            <a:pPr marL="0" indent="0" eaLnBrk="0" fontAlgn="base" hangingPunct="0">
+            <a:pPr eaLnBrk="0" fontAlgn="base" hangingPunct="0">
               <a:lnSpc>
                 <a:spcPct val="150000"/>
               </a:lnSpc>
@@ -4512,47 +4507,39 @@
               <a:spcAft>
                 <a:spcPct val="0"/>
               </a:spcAft>
-              <a:buFontTx/>
-              <a:buChar char="•"/>
             </a:pPr>
-            <a:endParaRPr kumimoji="0" lang="en-US" altLang="en-US" sz="1800" b="0" i="0" u="none" strike="noStrike" cap="none" normalizeH="0" baseline="0" dirty="0">
-              <a:ln>
-                <a:noFill/>
-              </a:ln>
-              <a:solidFill>
-                <a:schemeClr val="tx1"/>
-              </a:solidFill>
-              <a:effectLst/>
-              <a:latin typeface="Arial" panose="020B0604020202020204" pitchFamily="34" charset="0"/>
-            </a:endParaRPr>
-          </a:p>
-          <a:p>
-            <a:pPr marL="0" marR="0" lvl="0" indent="0" algn="l" defTabSz="914400" rtl="0" eaLnBrk="0" fontAlgn="base" latinLnBrk="0" hangingPunct="0">
-              <a:lnSpc>
-                <a:spcPct val="150000"/>
-              </a:lnSpc>
-              <a:spcBef>
-                <a:spcPct val="0"/>
-              </a:spcBef>
-              <a:spcAft>
-                <a:spcPct val="0"/>
-              </a:spcAft>
-              <a:buClrTx/>
-              <a:buSzTx/>
-              <a:buFontTx/>
-              <a:buChar char="•"/>
-              <a:tabLst/>
-            </a:pPr>
-            <a:endParaRPr kumimoji="0" lang="en-US" altLang="en-US" sz="1800" b="0" i="0" u="none" strike="noStrike" cap="none" normalizeH="0" baseline="0" dirty="0">
-              <a:ln>
-                <a:noFill/>
-              </a:ln>
-              <a:solidFill>
-                <a:schemeClr val="tx1"/>
-              </a:solidFill>
-              <a:effectLst/>
-              <a:latin typeface="Arial" panose="020B0604020202020204" pitchFamily="34" charset="0"/>
-            </a:endParaRPr>
+            <a:r>
+              <a:rPr kumimoji="0" lang="en-US" altLang="en-US" b="0" i="0" u="none" strike="noStrike" cap="none" normalizeH="0" baseline="0" dirty="0">
+                <a:ln>
+                  <a:noFill/>
+                </a:ln>
+                <a:solidFill>
+                  <a:schemeClr val="tx1"/>
+                </a:solidFill>
+                <a:effectLst/>
+                <a:latin typeface="Arial" panose="020B0604020202020204" pitchFamily="34" charset="0"/>
+              </a:rPr>
+              <a:t>Test Set:</a:t>
+            </a:r>
+            <a:r>
+              <a:rPr lang="en-US" altLang="en-US" dirty="0">
+                <a:latin typeface="Arial" panose="020B0604020202020204" pitchFamily="34" charset="0"/>
+              </a:rPr>
+              <a:t> Labeled portion of human proteome (from </a:t>
+            </a:r>
+            <a:r>
+              <a:rPr lang="en-US" altLang="en-US" dirty="0">
+                <a:latin typeface="Arial" panose="020B0604020202020204" pitchFamily="34" charset="0"/>
+                <a:hlinkClick r:id="rId3"/>
+              </a:rPr>
+              <a:t>Kırlı et al</a:t>
+            </a:r>
+            <a:r>
+              <a:rPr lang="en-US" altLang="en-US" dirty="0">
+                <a:latin typeface="Arial" panose="020B0604020202020204" pitchFamily="34" charset="0"/>
+              </a:rPr>
+              <a:t>).</a:t>
+            </a:r>
           </a:p>
         </p:txBody>
       </p:sp>
@@ -5121,7 +5108,7 @@
         <p:spPr>
           <a:xfrm>
             <a:off x="704088" y="2231136"/>
-            <a:ext cx="5533750" cy="1725228"/>
+            <a:ext cx="5153504" cy="1725228"/>
           </a:xfrm>
         </p:spPr>
         <p:txBody>
@@ -5170,8 +5157,8 @@
         </p:blipFill>
         <p:spPr>
           <a:xfrm>
-            <a:off x="6715328" y="914400"/>
-            <a:ext cx="5151385" cy="5157914"/>
+            <a:off x="6002720" y="606584"/>
+            <a:ext cx="5863994" cy="5465730"/>
           </a:xfrm>
           <a:prstGeom prst="rect">
             <a:avLst/>
@@ -5449,8 +5436,8 @@
         </p:blipFill>
         <p:spPr>
           <a:xfrm>
-            <a:off x="6221505" y="515517"/>
-            <a:ext cx="5633421" cy="5647539"/>
+            <a:off x="6096001" y="389697"/>
+            <a:ext cx="5758926" cy="5773359"/>
           </a:xfrm>
           <a:prstGeom prst="rect">
             <a:avLst/>
@@ -5948,6 +5935,106 @@
 </p:sld>
 </file>
 
+<file path=ppt/slides/slide9.xml><?xml version="1.0" encoding="utf-8"?>
+<p:sld xmlns:a="http://schemas.openxmlformats.org/drawingml/2006/main" xmlns:r="http://schemas.openxmlformats.org/officeDocument/2006/relationships" xmlns:p="http://schemas.openxmlformats.org/presentationml/2006/main">
+  <p:cSld>
+    <p:spTree>
+      <p:nvGrpSpPr>
+        <p:cNvPr id="1" name=""/>
+        <p:cNvGrpSpPr/>
+        <p:nvPr/>
+      </p:nvGrpSpPr>
+      <p:grpSpPr>
+        <a:xfrm>
+          <a:off x="0" y="0"/>
+          <a:ext cx="0" cy="0"/>
+          <a:chOff x="0" y="0"/>
+          <a:chExt cx="0" cy="0"/>
+        </a:xfrm>
+      </p:grpSpPr>
+      <p:sp>
+        <p:nvSpPr>
+          <p:cNvPr id="2" name="Title 1">
+            <a:extLst>
+              <a:ext uri="{FF2B5EF4-FFF2-40B4-BE49-F238E27FC236}">
+                <a16:creationId xmlns:a16="http://schemas.microsoft.com/office/drawing/2014/main" id="{EF40AC7E-D173-8340-14F0-89F2A804DFB8}"/>
+              </a:ext>
+            </a:extLst>
+          </p:cNvPr>
+          <p:cNvSpPr>
+            <a:spLocks noGrp="1"/>
+          </p:cNvSpPr>
+          <p:nvPr>
+            <p:ph type="title"/>
+          </p:nvPr>
+        </p:nvSpPr>
+        <p:spPr/>
+        <p:txBody>
+          <a:bodyPr/>
+          <a:lstStyle/>
+          <a:p>
+            <a:r>
+              <a:rPr lang="en-AU" dirty="0"/>
+              <a:t>Future Work</a:t>
+            </a:r>
+            <a:endParaRPr lang="en-IL" dirty="0"/>
+          </a:p>
+        </p:txBody>
+      </p:sp>
+      <p:sp>
+        <p:nvSpPr>
+          <p:cNvPr id="3" name="Content Placeholder 2">
+            <a:extLst>
+              <a:ext uri="{FF2B5EF4-FFF2-40B4-BE49-F238E27FC236}">
+                <a16:creationId xmlns:a16="http://schemas.microsoft.com/office/drawing/2014/main" id="{6C895687-9594-6CFC-5A74-6104E1A6F48B}"/>
+              </a:ext>
+            </a:extLst>
+          </p:cNvPr>
+          <p:cNvSpPr>
+            <a:spLocks noGrp="1"/>
+          </p:cNvSpPr>
+          <p:nvPr>
+            <p:ph idx="1"/>
+          </p:nvPr>
+        </p:nvSpPr>
+        <p:spPr/>
+        <p:txBody>
+          <a:bodyPr/>
+          <a:lstStyle/>
+          <a:p>
+            <a:r>
+              <a:rPr lang="en-US" dirty="0"/>
+              <a:t>We think the most critical part is collecting better data, especially negative samples for training.</a:t>
+            </a:r>
+          </a:p>
+          <a:p>
+            <a:r>
+              <a:rPr lang="en-US" dirty="0"/>
+              <a:t>One option is to look for human proteins which bind to different transporter proteins. *</a:t>
+            </a:r>
+          </a:p>
+          <a:p>
+            <a:r>
+              <a:rPr lang="en-US" dirty="0"/>
+              <a:t>* this would still require knowing the binding sites so that we can take those as our widow, as well as requiring the sites to not be any larger than our sliding window of size 20, so that the separation would not be trivial.</a:t>
+            </a:r>
+            <a:endParaRPr lang="en-IL" dirty="0"/>
+          </a:p>
+        </p:txBody>
+      </p:sp>
+    </p:spTree>
+    <p:extLst>
+      <p:ext uri="{BB962C8B-B14F-4D97-AF65-F5344CB8AC3E}">
+        <p14:creationId xmlns:p14="http://schemas.microsoft.com/office/powerpoint/2010/main" val="2758732938"/>
+      </p:ext>
+    </p:extLst>
+  </p:cSld>
+  <p:clrMapOvr>
+    <a:masterClrMapping/>
+  </p:clrMapOvr>
+</p:sld>
+</file>
+
 <file path=ppt/theme/theme1.xml><?xml version="1.0" encoding="utf-8"?>
 <a:theme xmlns:a="http://schemas.openxmlformats.org/drawingml/2006/main" name="ChronicleVTI">
   <a:themeElements>

--- a/NES-Finder.pptx
+++ b/NES-Finder.pptx
@@ -5997,7 +5997,12 @@
             <p:ph idx="1"/>
           </p:nvPr>
         </p:nvSpPr>
-        <p:spPr/>
+        <p:spPr>
+          <a:xfrm>
+            <a:off x="700635" y="2221992"/>
+            <a:ext cx="10691265" cy="2603505"/>
+          </a:xfrm>
+        </p:spPr>
         <p:txBody>
           <a:bodyPr/>
           <a:lstStyle/>
